--- a/Sztatinok helye.pptx
+++ b/Sztatinok helye.pptx
@@ -6884,13 +6884,22 @@
         <p:spPr/>
         <p:txBody>
           <a:bodyPr>
-            <a:normAutofit fontScale="92500" lnSpcReduction="20000"/>
+            <a:normAutofit fontScale="70000" lnSpcReduction="20000"/>
           </a:bodyPr>
           <a:lstStyle/>
           <a:p>
             <a:r>
+              <a:rPr lang="en-HU" b="1"/>
+              <a:t>A koleszterincsökkentésen kívül semmilyen más kardiológiai irányelvre nem jellemző a laikus közvélemény ilyen mértékű szembenállása</a:t>
+            </a:r>
+          </a:p>
+          <a:p>
+            <a:endParaRPr lang="en-HU"/>
+          </a:p>
+          <a:p>
+            <a:r>
               <a:rPr lang="en-HU"/>
-              <a:t>a főáramú tudomány megállapításaihoz képest az előnyöket jelentősen alábecsülik, a mellékhatásokat pedig túlértékelik</a:t>
+              <a:t>A sztatinellenes influenszerek a főáramú tudomány megállapításaihoz képest az előnyöket jelentősen alábecsülik, a mellékhatásokat pedig túlértékelik</a:t>
             </a:r>
           </a:p>
           <a:p>
@@ -6900,7 +6909,7 @@
             <a:pPr fontAlgn="t"/>
             <a:r>
               <a:rPr lang="en-HU"/>
-              <a:t>az Egyesült Királyságban egy fél éves időszakban mintegy </a:t>
+              <a:t>Az Egyesült Királyságban egy fél éves időszakban mintegy </a:t>
             </a:r>
             <a:r>
               <a:rPr lang="en-HU" b="1"/>

--- a/Sztatinok helye.pptx
+++ b/Sztatinok helye.pptx
@@ -1,6 +1,6 @@
 
 <file path=ppt/presentation.xml><?xml version="1.0" encoding="utf-8"?>
-<p:presentation xmlns:a="http://schemas.openxmlformats.org/drawingml/2006/main" xmlns:r="http://schemas.openxmlformats.org/officeDocument/2006/relationships" xmlns:p="http://schemas.openxmlformats.org/presentationml/2006/main" saveSubsetFonts="1" autoCompressPictures="0">
+<p:presentation xmlns:a="http://schemas.openxmlformats.org/drawingml/2006/main" xmlns:r="http://schemas.openxmlformats.org/officeDocument/2006/relationships" xmlns:p="http://schemas.openxmlformats.org/presentationml/2006/main" embedTrueTypeFonts="1" saveSubsetFonts="1" autoCompressPictures="0">
   <p:sldMasterIdLst>
     <p:sldMasterId id="2147483648" r:id="rId1"/>
   </p:sldMasterIdLst>
